--- a/presentacion/ASCEND_Defensa.pptx
+++ b/presentacion/ASCEND_Defensa.pptx
@@ -2250,7 +2250,7 @@
                 <a:latin typeface="Segoe UI"/>
                 <a:ea typeface="Segoe UI"/>
               </a:rPr>
-              <a:t>41 tablas, 6 migraciones, seed QA, respaldo y replicación.</a:t>
+              <a:t>41 tablas, 7 migraciones, seed QA, respaldo y replicación.</a:t>
             </a:r>
           </a:p>
         </p:txBody>
@@ -9503,7 +9503,7 @@
                 <a:latin typeface="Segoe UI"/>
                 <a:ea typeface="Segoe UI"/>
               </a:rPr>
-              <a:t>41 tablas, 6 migraciones y un seed que permite probar todos los formatos.</a:t>
+              <a:t>41 tablas, 7 migraciones y un seed que permite probar todos los formatos.</a:t>
             </a:r>
           </a:p>
         </p:txBody>
